--- a/examples/pm2_simple_numbering/simple_numbering_guide.pptx
+++ b/examples/pm2_simple_numbering/simple_numbering_guide.pptx
@@ -589,9 +589,7 @@
               <a:t>NOTE_CONTENT_FORMAT: 1.0</a:t>
             </a:r>
           </a:p>
-          <a:p>
-            <a:endParaRPr/>
-          </a:p>
+          <a:p/>
           <a:p>
             <a:r>
               <a:t>===BLOCK===</a:t>
@@ -602,9 +600,7 @@
               <a:t>{{BLOCK:IMAGE}}</a:t>
             </a:r>
           </a:p>
-          <a:p>
-            <a:endParaRPr/>
-          </a:p>
+          <a:p/>
           <a:p>
             <a:r>
               <a:t>export-image-mode: slide_with_rectpct</a:t>
@@ -617,49 +613,37 @@
           </a:p>
           <a:p>
             <a:r>
-              <a:rPr lang="en-US"/>
               <a:t>export-image: extracted/figures/&lt;__BASEFILENAME__&gt;_slide&lt;__SLIDENUM__&gt;_fig.png</a:t>
             </a:r>
           </a:p>
-          <a:p>
-            <a:endParaRPr/>
-          </a:p>
-          <a:p>
-            <a:r>
-              <a:rPr lang="en-US" altLang="ja-JP"/>
+          <a:p/>
+          <a:p>
+            <a:r>
               <a:t>===BLOCK===</a:t>
             </a:r>
           </a:p>
           <a:p>
             <a:r>
-              <a:rPr lang="en-US" altLang="ja-JP"/>
               <a:t>{{BLOCK:IMAGE}}</a:t>
             </a:r>
           </a:p>
-          <a:p>
-            <a:endParaRPr lang="en-US" altLang="ja-JP"/>
-          </a:p>
-          <a:p>
-            <a:r>
-              <a:rPr lang="en-US" altLang="ja-JP"/>
+          <a:p/>
+          <a:p>
+            <a:r>
               <a:t>export-image-mode: slide_with_rectpct</a:t>
             </a:r>
           </a:p>
           <a:p>
             <a:r>
-              <a:rPr lang="en-US" altLang="ja-JP"/>
               <a:t>export-image-target: keyvisual</a:t>
             </a:r>
           </a:p>
           <a:p>
             <a:r>
-              <a:rPr lang="en-US" altLang="ja-JP"/>
               <a:t>export-image: extracted/figures/&lt;__BASEFILENAME__&gt;_keyvisual.png</a:t>
             </a:r>
           </a:p>
-          <a:p>
-            <a:endParaRPr lang="en-US" altLang="ja-JP"/>
-          </a:p>
+          <a:p/>
           <a:p>
             <a:r>
               <a:t>===BLOCK===</a:t>
@@ -670,25 +654,15 @@
               <a:t>{{BLOCK:MD:LONG}}</a:t>
             </a:r>
           </a:p>
-          <a:p>
-            <a:endParaRPr/>
-          </a:p>
-          <a:p>
-            <a:r>
-              <a:rPr lang="en-US"/>
+          <a:p/>
+          <a:p>
+            <a:r>
               <a:t>export-note: extracted/&lt;__BASEFILENAME__&gt;_slide&lt;__SLIDENUM__&gt;_md.md</a:t>
             </a:r>
           </a:p>
           <a:p>
             <a:r>
-              <a:t>{{#id:section:&lt;__BASEFILENAME__&gt;:slide</a:t>
-            </a:r>
-            <a:r>
-              <a:rPr lang="en-US"/>
-              <a:t>&lt;__SLIDENUM__&gt;</a:t>
-            </a:r>
-            <a:r>
-              <a:t>}}</a:t>
+              <a:t>{{#id:section:&lt;__BASEFILENAME__&gt;:slide&lt;__SLIDENUM__&gt;}}</a:t>
             </a:r>
           </a:p>
           <a:p>
@@ -696,116 +670,57 @@
               <a:t>## &lt;__TITLE__&gt;</a:t>
             </a:r>
           </a:p>
-          <a:p>
-            <a:endParaRPr/>
-          </a:p>
+          <a:p/>
           <a:p>
             <a:r>
               <a:t>簡易ナンバリングは、2つの pptx ファイルを結合してファイル単位でchapterとしてナンバリングする機能です。</a:t>
             </a:r>
           </a:p>
-          <a:p>
-            <a:endParaRPr/>
-          </a:p>
+          <a:p/>
           <a:p>
             <a:r>
               <a:t>chapter とは日本語でいえば「章」のことで、 「1章2節」 のような、章・節によるナンバリングを行うにあたり、pptxファイルひとつを1章（chapter）と考えます。</a:t>
             </a:r>
           </a:p>
-          <a:p>
-            <a:endParaRPr/>
-          </a:p>
+          <a:p/>
           <a:p>
             <a:r>
               <a:t>このナンバリング方式を chapt_section 方式と呼びます、</a:t>
             </a:r>
           </a:p>
-          <a:p>
-            <a:endParaRPr/>
-          </a:p>
+          <a:p/>
           <a:p>
             <a:r>
               <a:t>処理のイメージは下記の通りです。</a:t>
             </a:r>
           </a:p>
-          <a:p>
-            <a:endParaRPr/>
-          </a:p>
-          <a:p>
-            <a:r>
-              <a:t>```{=latex}</a:t>
-            </a:r>
-          </a:p>
-          <a:p>
-            <a:r>
-              <a:t>\begin{center}</a:t>
-            </a:r>
-          </a:p>
-          <a:p>
-            <a:r>
-              <a:t>```</a:t>
-            </a:r>
-          </a:p>
-          <a:p>
-            <a:endParaRPr/>
-          </a:p>
-          <a:p>
-            <a:r>
-              <a:rPr lang="en-US" altLang="ja-JP"/>
+          <a:p/>
+          <a:p>
+            <a:r>
+              <a:t>::: {.center}</a:t>
+            </a:r>
+          </a:p>
+          <a:p/>
+          <a:p>
+            <a:r>
               <a:t>![](figures/&lt;__BASEFILENAME__&gt;_slide&lt;__SLIDENUM__&gt;_fig.png){ width=95% }</a:t>
             </a:r>
           </a:p>
-          <a:p>
-            <a:endParaRPr lang="en-US" altLang="ja-JP"/>
-          </a:p>
-          <a:p>
-            <a:pPr marL="0" marR="0" lvl="0" indent="0" algn="l" defTabSz="914400" rtl="0" eaLnBrk="1" fontAlgn="auto" latinLnBrk="0" hangingPunct="1">
-              <a:lnSpc>
-                <a:spcPct val="100000"/>
-              </a:lnSpc>
-              <a:spcBef>
-                <a:spcPts val="0"/>
-              </a:spcBef>
-              <a:spcAft>
-                <a:spcPts val="0"/>
-              </a:spcAft>
-              <a:buClrTx/>
-              <a:buSzTx/>
-              <a:buFontTx/>
-              <a:buNone/>
-              <a:tabLst/>
-              <a:defRPr/>
-            </a:pPr>
-            <a:r>
-              <a:rPr lang="en-US" altLang="ja-JP"/>
+          <a:p/>
+          <a:p>
+            <a:r>
               <a:t>![](figures/&lt;__BASEFILENAME__&gt;_keyvisual.png){ width=70% }</a:t>
             </a:r>
           </a:p>
-          <a:p>
-            <a:endParaRPr lang="en-US" altLang="ja-JP"/>
-          </a:p>
-          <a:p>
-            <a:endParaRPr/>
-          </a:p>
-          <a:p>
-            <a:r>
-              <a:t>```{=latex}</a:t>
-            </a:r>
-          </a:p>
-          <a:p>
-            <a:r>
-              <a:t>\end{center}</a:t>
-            </a:r>
-          </a:p>
-          <a:p>
-            <a:r>
-              <a:t>```</a:t>
-            </a:r>
-            <a:endParaRPr lang="en-US"/>
-          </a:p>
-          <a:p>
-            <a:endParaRPr/>
-          </a:p>
+          <a:p/>
+          <a:p/>
+          <a:p>
+            <a:r>
+              <a:t>:::</a:t>
+            </a:r>
+          </a:p>
+          <a:p/>
+          <a:p/>
         </p:txBody>
       </p:sp>
       <p:sp>
@@ -1232,9 +1147,7 @@
               <a:t>NOTE_CONTENT_FORMAT: 1.0</a:t>
             </a:r>
           </a:p>
-          <a:p>
-            <a:endParaRPr/>
-          </a:p>
+          <a:p/>
           <a:p>
             <a:r>
               <a:t>===BLOCK===</a:t>
@@ -1245,9 +1158,7 @@
               <a:t>{{BLOCK:IMAGE}}</a:t>
             </a:r>
           </a:p>
-          <a:p>
-            <a:endParaRPr/>
-          </a:p>
+          <a:p/>
           <a:p>
             <a:r>
               <a:t>export-image-mode: slide_with_rectpct</a:t>
@@ -1260,13 +1171,10 @@
           </a:p>
           <a:p>
             <a:r>
-              <a:rPr lang="en-US"/>
               <a:t>export-image: extracted/figures/&lt;__BASEFILENAME__&gt;_slide&lt;__SLIDENUM__&gt;_fig.png</a:t>
             </a:r>
           </a:p>
-          <a:p>
-            <a:endParaRPr/>
-          </a:p>
+          <a:p/>
           <a:p>
             <a:r>
               <a:t>===BLOCK===</a:t>
@@ -1277,18 +1185,14 @@
               <a:t>{{BLOCK:MD:LONG}}</a:t>
             </a:r>
           </a:p>
-          <a:p>
-            <a:endParaRPr/>
-          </a:p>
-          <a:p>
-            <a:r>
-              <a:rPr lang="en-US"/>
+          <a:p/>
+          <a:p>
+            <a:r>
               <a:t>export-note: extracted/&lt;__BASEFILENAME__&gt;_slide&lt;__SLIDENUM__&gt;_md.md</a:t>
             </a:r>
           </a:p>
           <a:p>
             <a:r>
-              <a:rPr lang="en-US"/>
               <a:t>{{#id:section:&lt;__BASEFILENAME__&gt;:slide&lt;__SLIDENUM__&gt;}}</a:t>
             </a:r>
           </a:p>
@@ -1297,71 +1201,38 @@
               <a:t>## &lt;__TITLE__&gt;</a:t>
             </a:r>
           </a:p>
-          <a:p>
-            <a:endParaRPr/>
-          </a:p>
+          <a:p/>
           <a:p>
             <a:r>
               <a:t>実行後は2つのpptxファイルがマージ（結合）されています。</a:t>
             </a:r>
           </a:p>
-          <a:p>
-            <a:endParaRPr/>
-          </a:p>
+          <a:p/>
           <a:p>
             <a:r>
               <a:t>簡易ナンバリングを指定したので章・節番号がついて、pptxファイルが変わると新しい chapter となっています。</a:t>
             </a:r>
           </a:p>
-          <a:p>
-            <a:endParaRPr/>
-          </a:p>
-          <a:p>
-            <a:r>
-              <a:t>```{=latex}</a:t>
-            </a:r>
-          </a:p>
-          <a:p>
-            <a:r>
-              <a:t>\begin{center}</a:t>
-            </a:r>
-          </a:p>
-          <a:p>
-            <a:r>
-              <a:t>```</a:t>
-            </a:r>
-          </a:p>
-          <a:p>
-            <a:endParaRPr/>
-          </a:p>
-          <a:p>
-            <a:r>
-              <a:rPr lang="en-US"/>
+          <a:p/>
+          <a:p>
+            <a:r>
+              <a:t>::: {.center}</a:t>
+            </a:r>
+          </a:p>
+          <a:p/>
+          <a:p>
+            <a:r>
               <a:t>![](figures/&lt;__BASEFILENAME__&gt;_slide&lt;__SLIDENUM__&gt;_fig.png){ width=95% }</a:t>
             </a:r>
           </a:p>
-          <a:p>
-            <a:endParaRPr/>
-          </a:p>
-          <a:p>
-            <a:r>
-              <a:t>```{=latex}</a:t>
-            </a:r>
-          </a:p>
-          <a:p>
-            <a:r>
-              <a:t>\end{center}</a:t>
-            </a:r>
-          </a:p>
-          <a:p>
-            <a:r>
-              <a:t>```</a:t>
-            </a:r>
-            <a:endParaRPr lang="en-US"/>
-          </a:p>
-          <a:p>
-            <a:endParaRPr/>
-          </a:p>
+          <a:p/>
+          <a:p>
+            <a:r>
+              <a:t>:::</a:t>
+            </a:r>
+          </a:p>
+          <a:p/>
+          <a:p/>
         </p:txBody>
       </p:sp>
       <p:sp>
@@ -1472,9 +1343,7 @@
               <a:t>NOTE_CONTENT_FORMAT: 1.0</a:t>
             </a:r>
           </a:p>
-          <a:p>
-            <a:endParaRPr/>
-          </a:p>
+          <a:p/>
           <a:p>
             <a:r>
               <a:t>===BLOCK===</a:t>
@@ -1485,9 +1354,7 @@
               <a:t>{{BLOCK:IMAGE}}</a:t>
             </a:r>
           </a:p>
-          <a:p>
-            <a:endParaRPr/>
-          </a:p>
+          <a:p/>
           <a:p>
             <a:r>
               <a:t>export-image-mode: slide_with_rectpct</a:t>
@@ -1500,13 +1367,10 @@
           </a:p>
           <a:p>
             <a:r>
-              <a:rPr lang="en-US"/>
               <a:t>export-image: extracted/figures/&lt;__BASEFILENAME__&gt;_slide&lt;__SLIDENUM__&gt;_fig.png</a:t>
             </a:r>
           </a:p>
-          <a:p>
-            <a:endParaRPr/>
-          </a:p>
+          <a:p/>
           <a:p>
             <a:r>
               <a:t>===BLOCK===</a:t>
@@ -1517,18 +1381,14 @@
               <a:t>{{BLOCK:MD:LONG}}</a:t>
             </a:r>
           </a:p>
-          <a:p>
-            <a:endParaRPr/>
-          </a:p>
-          <a:p>
-            <a:r>
-              <a:rPr lang="en-US"/>
+          <a:p/>
+          <a:p>
+            <a:r>
               <a:t>export-note: extracted/&lt;__BASEFILENAME__&gt;_slide&lt;__SLIDENUM__&gt;_md.md</a:t>
             </a:r>
           </a:p>
           <a:p>
             <a:r>
-              <a:rPr lang="en-US"/>
               <a:t>{{#id:section:&lt;__BASEFILENAME__&gt;:slide&lt;__SLIDENUM__&gt;}}</a:t>
             </a:r>
           </a:p>
@@ -1537,25 +1397,19 @@
               <a:t>## &lt;__TITLE__&gt;</a:t>
             </a:r>
           </a:p>
-          <a:p>
-            <a:endParaRPr/>
-          </a:p>
+          <a:p/>
           <a:p>
             <a:r>
               <a:t>indexer.pptxnumbering: という項目に chapt_section と記載すると、簡易ナンバリングを行います。</a:t>
             </a:r>
           </a:p>
-          <a:p>
-            <a:endParaRPr/>
-          </a:p>
+          <a:p/>
           <a:p>
             <a:r>
               <a:t>procedure の operation: chapter という項目で章番号のカウントアップを指示します。</a:t>
             </a:r>
           </a:p>
-          <a:p>
-            <a:endParaRPr/>
-          </a:p>
+          <a:p/>
           <a:p>
             <a:r>
               <a:t>```bash</a:t>
@@ -1576,58 +1430,27 @@
               <a:t>```</a:t>
             </a:r>
           </a:p>
-          <a:p>
-            <a:endParaRPr/>
-          </a:p>
-          <a:p>
-            <a:endParaRPr/>
-          </a:p>
-          <a:p>
-            <a:r>
-              <a:t>```{=latex}</a:t>
-            </a:r>
-          </a:p>
-          <a:p>
-            <a:r>
-              <a:t>\begin{center}</a:t>
-            </a:r>
-          </a:p>
-          <a:p>
-            <a:r>
-              <a:t>```</a:t>
-            </a:r>
-          </a:p>
-          <a:p>
-            <a:endParaRPr/>
-          </a:p>
-          <a:p>
-            <a:r>
-              <a:rPr lang="en-US"/>
+          <a:p/>
+          <a:p/>
+          <a:p>
+            <a:r>
+              <a:t>::: {.center}</a:t>
+            </a:r>
+          </a:p>
+          <a:p/>
+          <a:p>
+            <a:r>
               <a:t>![](figures/&lt;__BASEFILENAME__&gt;_slide&lt;__SLIDENUM__&gt;_fig.png){ width=95% }</a:t>
             </a:r>
           </a:p>
-          <a:p>
-            <a:endParaRPr/>
-          </a:p>
-          <a:p>
-            <a:r>
-              <a:t>```{=latex}</a:t>
-            </a:r>
-          </a:p>
-          <a:p>
-            <a:r>
-              <a:t>\end{center}</a:t>
-            </a:r>
-          </a:p>
-          <a:p>
-            <a:r>
-              <a:t>```</a:t>
-            </a:r>
-            <a:endParaRPr lang="en-US"/>
-          </a:p>
-          <a:p>
-            <a:endParaRPr/>
-          </a:p>
+          <a:p/>
+          <a:p>
+            <a:r>
+              <a:t>:::</a:t>
+            </a:r>
+          </a:p>
+          <a:p/>
+          <a:p/>
         </p:txBody>
       </p:sp>
       <p:sp>
@@ -1720,9 +1543,7 @@
               <a:t>NOTE_CONTENT_FORMAT: 1.0</a:t>
             </a:r>
           </a:p>
-          <a:p>
-            <a:endParaRPr/>
-          </a:p>
+          <a:p/>
           <a:p>
             <a:r>
               <a:t>===BLOCK===</a:t>
@@ -1733,9 +1554,7 @@
               <a:t>{{BLOCK:IMAGE}}</a:t>
             </a:r>
           </a:p>
-          <a:p>
-            <a:endParaRPr/>
-          </a:p>
+          <a:p/>
           <a:p>
             <a:r>
               <a:t>export-image-mode: slide_with_rectpct</a:t>
@@ -1748,13 +1567,10 @@
           </a:p>
           <a:p>
             <a:r>
-              <a:rPr lang="en-US"/>
               <a:t>export-image: extracted/figures/&lt;__BASEFILENAME__&gt;_slide&lt;__SLIDENUM__&gt;_fig.png</a:t>
             </a:r>
           </a:p>
-          <a:p>
-            <a:endParaRPr/>
-          </a:p>
+          <a:p/>
           <a:p>
             <a:r>
               <a:t>===BLOCK===</a:t>
@@ -1765,18 +1581,14 @@
               <a:t>{{BLOCK:MD:LONG}}</a:t>
             </a:r>
           </a:p>
-          <a:p>
-            <a:endParaRPr/>
-          </a:p>
-          <a:p>
-            <a:r>
-              <a:rPr lang="en-US"/>
+          <a:p/>
+          <a:p>
+            <a:r>
               <a:t>export-note: extracted/&lt;__BASEFILENAME__&gt;_slide&lt;__SLIDENUM__&gt;_md.md</a:t>
             </a:r>
           </a:p>
           <a:p>
             <a:r>
-              <a:rPr lang="en-US"/>
               <a:t>{{#id:section:&lt;__BASEFILENAME__&gt;:slide&lt;__SLIDENUM__&gt;}}</a:t>
             </a:r>
           </a:p>
@@ -1785,9 +1597,7 @@
               <a:t>## &lt;__TITLE__&gt;</a:t>
             </a:r>
           </a:p>
-          <a:p>
-            <a:endParaRPr/>
-          </a:p>
+          <a:p/>
           <a:p>
             <a:r>
               <a:t>chapt_section 方式は、pptmerge のプロセスが内部的に付番用変数を管理して行うものです。</a:t>
@@ -1798,9 +1608,7 @@
               <a:t>chapter, section の変数はいずれも処理開始前は 0 であり、operation を経る都度、加算やリセットされます。"+" の部分を変えれば単純なカウントアップ以外の操作も可能です。</a:t>
             </a:r>
           </a:p>
-          <a:p>
-            <a:endParaRPr/>
-          </a:p>
+          <a:p/>
           <a:p>
             <a:r>
               <a:t>```bash</a:t>
@@ -1826,9 +1634,7 @@
               <a:t>```</a:t>
             </a:r>
           </a:p>
-          <a:p>
-            <a:endParaRPr/>
-          </a:p>
+          <a:p/>
           <a:p>
             <a:r>
               <a:t>section はスライドが進むことにより自動的にカウントアップされます。</a:t>
@@ -1839,58 +1645,27 @@
               <a:t>chapter 増やすにはここで説明した　operation: chapter の操作をするか、あるいは スライド上のマーカーによりカウントする方法もあります（別項目にて説明します）。</a:t>
             </a:r>
           </a:p>
-          <a:p>
-            <a:endParaRPr/>
-          </a:p>
-          <a:p>
-            <a:endParaRPr/>
-          </a:p>
-          <a:p>
-            <a:r>
-              <a:t>```{=latex}</a:t>
-            </a:r>
-          </a:p>
-          <a:p>
-            <a:r>
-              <a:t>\begin{center}</a:t>
-            </a:r>
-          </a:p>
-          <a:p>
-            <a:r>
-              <a:t>```</a:t>
-            </a:r>
-          </a:p>
-          <a:p>
-            <a:endParaRPr/>
-          </a:p>
-          <a:p>
-            <a:r>
-              <a:rPr lang="en-US"/>
+          <a:p/>
+          <a:p/>
+          <a:p>
+            <a:r>
+              <a:t>::: {.center}</a:t>
+            </a:r>
+          </a:p>
+          <a:p/>
+          <a:p>
+            <a:r>
               <a:t>![](figures/&lt;__BASEFILENAME__&gt;_slide&lt;__SLIDENUM__&gt;_fig.png){ width=95% }</a:t>
             </a:r>
           </a:p>
-          <a:p>
-            <a:endParaRPr/>
-          </a:p>
-          <a:p>
-            <a:r>
-              <a:t>```{=latex}</a:t>
-            </a:r>
-          </a:p>
-          <a:p>
-            <a:r>
-              <a:t>\end{center}</a:t>
-            </a:r>
-          </a:p>
-          <a:p>
-            <a:r>
-              <a:t>```</a:t>
-            </a:r>
-            <a:endParaRPr lang="en-US"/>
-          </a:p>
-          <a:p>
-            <a:endParaRPr/>
-          </a:p>
+          <a:p/>
+          <a:p>
+            <a:r>
+              <a:t>:::</a:t>
+            </a:r>
+          </a:p>
+          <a:p/>
+          <a:p/>
         </p:txBody>
       </p:sp>
       <p:sp>
